--- a/7th Semester/CCE-411_Algorithm Engineering/Algo Mid murad sir part/optimization algorithm 14-7-26 stu version.pptx
+++ b/7th Semester/CCE-411_Algorithm Engineering/Algo Mid murad sir part/optimization algorithm 14-7-26 stu version.pptx
@@ -1,28 +1,28 @@
 
 <file path=ppt/presentation.xml><?xml version="1.0" encoding="utf-8"?>
-<p:presentation xmlns:a="http://schemas.openxmlformats.org/drawingml/2006/main" xmlns:r="http://schemas.openxmlformats.org/officeDocument/2006/relationships" xmlns:p="http://schemas.openxmlformats.org/presentationml/2006/main" saveSubsetFonts="1">
+<p:presentation xmlns:a="http://schemas.openxmlformats.org/drawingml/2006/main" xmlns:r="http://schemas.openxmlformats.org/officeDocument/2006/relationships" xmlns:p="http://schemas.openxmlformats.org/presentationml/2006/main">
   <p:sldMasterIdLst>
     <p:sldMasterId id="2147483648" r:id="rId1"/>
   </p:sldMasterIdLst>
   <p:sldIdLst>
-    <p:sldId id="275" r:id="rId2"/>
-    <p:sldId id="276" r:id="rId3"/>
-    <p:sldId id="277" r:id="rId4"/>
-    <p:sldId id="256" r:id="rId5"/>
-    <p:sldId id="257" r:id="rId6"/>
-    <p:sldId id="258" r:id="rId7"/>
-    <p:sldId id="278" r:id="rId8"/>
-    <p:sldId id="262" r:id="rId9"/>
-    <p:sldId id="263" r:id="rId10"/>
-    <p:sldId id="279" r:id="rId11"/>
-    <p:sldId id="267" r:id="rId12"/>
-    <p:sldId id="264" r:id="rId13"/>
-    <p:sldId id="265" r:id="rId14"/>
-    <p:sldId id="266" r:id="rId15"/>
-    <p:sldId id="270" r:id="rId16"/>
-    <p:sldId id="271" r:id="rId17"/>
-    <p:sldId id="272" r:id="rId18"/>
-    <p:sldId id="273" r:id="rId19"/>
+    <p:sldId id="275" r:id="rId3"/>
+    <p:sldId id="276" r:id="rId4"/>
+    <p:sldId id="277" r:id="rId5"/>
+    <p:sldId id="256" r:id="rId6"/>
+    <p:sldId id="257" r:id="rId7"/>
+    <p:sldId id="258" r:id="rId8"/>
+    <p:sldId id="278" r:id="rId9"/>
+    <p:sldId id="262" r:id="rId10"/>
+    <p:sldId id="263" r:id="rId11"/>
+    <p:sldId id="279" r:id="rId12"/>
+    <p:sldId id="267" r:id="rId13"/>
+    <p:sldId id="264" r:id="rId14"/>
+    <p:sldId id="265" r:id="rId15"/>
+    <p:sldId id="266" r:id="rId16"/>
+    <p:sldId id="270" r:id="rId17"/>
+    <p:sldId id="271" r:id="rId18"/>
+    <p:sldId id="272" r:id="rId19"/>
+    <p:sldId id="273" r:id="rId20"/>
   </p:sldIdLst>
   <p:sldSz cx="12192000" cy="6858000"/>
   <p:notesSz cx="6858000" cy="9144000"/>
@@ -121,11 +121,6 @@
       </a:defRPr>
     </a:lvl9pPr>
   </p:defaultTextStyle>
-  <p:extLst>
-    <p:ext uri="{EFAFB233-063F-42B5-8137-9DF3F51BA10A}">
-      <p15:sldGuideLst xmlns:p15="http://schemas.microsoft.com/office/powerpoint/2012/main"/>
-    </p:ext>
-  </p:extLst>
 </p:presentation>
 </file>
 
@@ -174,6 +169,7 @@
               <a:rPr lang="en-US"/>
               <a:t>Click to edit Master title style</a:t>
             </a:r>
+            <a:endParaRPr lang="en-US"/>
           </a:p>
         </p:txBody>
       </p:sp>
@@ -238,6 +234,7 @@
               <a:rPr lang="en-US"/>
               <a:t>Click to edit Master subtitle style</a:t>
             </a:r>
+            <a:endParaRPr lang="en-US"/>
           </a:p>
         </p:txBody>
       </p:sp>
@@ -258,7 +255,6 @@
           <a:p>
             <a:fld id="{2470446D-3114-4B29-93A0-424C0DADEEAA}" type="datetimeFigureOut">
               <a:rPr lang="en-US" smtClean="0"/>
-              <a:t>7/14/2026</a:t>
             </a:fld>
             <a:endParaRPr lang="en-US"/>
           </a:p>
@@ -300,18 +296,12 @@
           <a:p>
             <a:fld id="{9ADE9FB4-766D-41AC-A33E-A445F4F39DC3}" type="slidenum">
               <a:rPr lang="en-US" smtClean="0"/>
-              <a:t>‹#›</a:t>
             </a:fld>
             <a:endParaRPr lang="en-US"/>
           </a:p>
         </p:txBody>
       </p:sp>
     </p:spTree>
-    <p:extLst>
-      <p:ext uri="{BB962C8B-B14F-4D97-AF65-F5344CB8AC3E}">
-        <p14:creationId xmlns:p14="http://schemas.microsoft.com/office/powerpoint/2010/main" val="3850104406"/>
-      </p:ext>
-    </p:extLst>
   </p:cSld>
   <p:clrMapOvr>
     <a:masterClrMapping/>
@@ -355,6 +345,7 @@
               <a:rPr lang="en-US"/>
               <a:t>Click to edit Master title style</a:t>
             </a:r>
+            <a:endParaRPr lang="en-US"/>
           </a:p>
         </p:txBody>
       </p:sp>
@@ -378,6 +369,7 @@
               <a:rPr lang="en-US"/>
               <a:t>Edit Master text styles</a:t>
             </a:r>
+            <a:endParaRPr lang="en-US"/>
           </a:p>
           <a:p>
             <a:pPr lvl="1"/>
@@ -385,6 +377,7 @@
               <a:rPr lang="en-US"/>
               <a:t>Second level</a:t>
             </a:r>
+            <a:endParaRPr lang="en-US"/>
           </a:p>
           <a:p>
             <a:pPr lvl="2"/>
@@ -392,6 +385,7 @@
               <a:rPr lang="en-US"/>
               <a:t>Third level</a:t>
             </a:r>
+            <a:endParaRPr lang="en-US"/>
           </a:p>
           <a:p>
             <a:pPr lvl="3"/>
@@ -399,6 +393,7 @@
               <a:rPr lang="en-US"/>
               <a:t>Fourth level</a:t>
             </a:r>
+            <a:endParaRPr lang="en-US"/>
           </a:p>
           <a:p>
             <a:pPr lvl="4"/>
@@ -406,6 +401,7 @@
               <a:rPr lang="en-US"/>
               <a:t>Fifth level</a:t>
             </a:r>
+            <a:endParaRPr lang="en-US"/>
           </a:p>
         </p:txBody>
       </p:sp>
@@ -426,7 +422,6 @@
           <a:p>
             <a:fld id="{2470446D-3114-4B29-93A0-424C0DADEEAA}" type="datetimeFigureOut">
               <a:rPr lang="en-US" smtClean="0"/>
-              <a:t>7/14/2026</a:t>
             </a:fld>
             <a:endParaRPr lang="en-US"/>
           </a:p>
@@ -468,18 +463,12 @@
           <a:p>
             <a:fld id="{9ADE9FB4-766D-41AC-A33E-A445F4F39DC3}" type="slidenum">
               <a:rPr lang="en-US" smtClean="0"/>
-              <a:t>‹#›</a:t>
             </a:fld>
             <a:endParaRPr lang="en-US"/>
           </a:p>
         </p:txBody>
       </p:sp>
     </p:spTree>
-    <p:extLst>
-      <p:ext uri="{BB962C8B-B14F-4D97-AF65-F5344CB8AC3E}">
-        <p14:creationId xmlns:p14="http://schemas.microsoft.com/office/powerpoint/2010/main" val="3464598501"/>
-      </p:ext>
-    </p:extLst>
   </p:cSld>
   <p:clrMapOvr>
     <a:masterClrMapping/>
@@ -528,6 +517,7 @@
               <a:rPr lang="en-US"/>
               <a:t>Click to edit Master title style</a:t>
             </a:r>
+            <a:endParaRPr lang="en-US"/>
           </a:p>
         </p:txBody>
       </p:sp>
@@ -556,6 +546,7 @@
               <a:rPr lang="en-US"/>
               <a:t>Edit Master text styles</a:t>
             </a:r>
+            <a:endParaRPr lang="en-US"/>
           </a:p>
           <a:p>
             <a:pPr lvl="1"/>
@@ -563,6 +554,7 @@
               <a:rPr lang="en-US"/>
               <a:t>Second level</a:t>
             </a:r>
+            <a:endParaRPr lang="en-US"/>
           </a:p>
           <a:p>
             <a:pPr lvl="2"/>
@@ -570,6 +562,7 @@
               <a:rPr lang="en-US"/>
               <a:t>Third level</a:t>
             </a:r>
+            <a:endParaRPr lang="en-US"/>
           </a:p>
           <a:p>
             <a:pPr lvl="3"/>
@@ -577,6 +570,7 @@
               <a:rPr lang="en-US"/>
               <a:t>Fourth level</a:t>
             </a:r>
+            <a:endParaRPr lang="en-US"/>
           </a:p>
           <a:p>
             <a:pPr lvl="4"/>
@@ -584,6 +578,7 @@
               <a:rPr lang="en-US"/>
               <a:t>Fifth level</a:t>
             </a:r>
+            <a:endParaRPr lang="en-US"/>
           </a:p>
         </p:txBody>
       </p:sp>
@@ -604,7 +599,6 @@
           <a:p>
             <a:fld id="{2470446D-3114-4B29-93A0-424C0DADEEAA}" type="datetimeFigureOut">
               <a:rPr lang="en-US" smtClean="0"/>
-              <a:t>7/14/2026</a:t>
             </a:fld>
             <a:endParaRPr lang="en-US"/>
           </a:p>
@@ -646,18 +640,12 @@
           <a:p>
             <a:fld id="{9ADE9FB4-766D-41AC-A33E-A445F4F39DC3}" type="slidenum">
               <a:rPr lang="en-US" smtClean="0"/>
-              <a:t>‹#›</a:t>
             </a:fld>
             <a:endParaRPr lang="en-US"/>
           </a:p>
         </p:txBody>
       </p:sp>
     </p:spTree>
-    <p:extLst>
-      <p:ext uri="{BB962C8B-B14F-4D97-AF65-F5344CB8AC3E}">
-        <p14:creationId xmlns:p14="http://schemas.microsoft.com/office/powerpoint/2010/main" val="866162451"/>
-      </p:ext>
-    </p:extLst>
   </p:cSld>
   <p:clrMapOvr>
     <a:masterClrMapping/>
@@ -701,6 +689,7 @@
               <a:rPr lang="en-US"/>
               <a:t>Click to edit Master title style</a:t>
             </a:r>
+            <a:endParaRPr lang="en-US"/>
           </a:p>
         </p:txBody>
       </p:sp>
@@ -724,6 +713,7 @@
               <a:rPr lang="en-US"/>
               <a:t>Edit Master text styles</a:t>
             </a:r>
+            <a:endParaRPr lang="en-US"/>
           </a:p>
           <a:p>
             <a:pPr lvl="1"/>
@@ -731,6 +721,7 @@
               <a:rPr lang="en-US"/>
               <a:t>Second level</a:t>
             </a:r>
+            <a:endParaRPr lang="en-US"/>
           </a:p>
           <a:p>
             <a:pPr lvl="2"/>
@@ -738,6 +729,7 @@
               <a:rPr lang="en-US"/>
               <a:t>Third level</a:t>
             </a:r>
+            <a:endParaRPr lang="en-US"/>
           </a:p>
           <a:p>
             <a:pPr lvl="3"/>
@@ -745,6 +737,7 @@
               <a:rPr lang="en-US"/>
               <a:t>Fourth level</a:t>
             </a:r>
+            <a:endParaRPr lang="en-US"/>
           </a:p>
           <a:p>
             <a:pPr lvl="4"/>
@@ -752,6 +745,7 @@
               <a:rPr lang="en-US"/>
               <a:t>Fifth level</a:t>
             </a:r>
+            <a:endParaRPr lang="en-US"/>
           </a:p>
         </p:txBody>
       </p:sp>
@@ -772,7 +766,6 @@
           <a:p>
             <a:fld id="{2470446D-3114-4B29-93A0-424C0DADEEAA}" type="datetimeFigureOut">
               <a:rPr lang="en-US" smtClean="0"/>
-              <a:t>7/14/2026</a:t>
             </a:fld>
             <a:endParaRPr lang="en-US"/>
           </a:p>
@@ -814,18 +807,12 @@
           <a:p>
             <a:fld id="{9ADE9FB4-766D-41AC-A33E-A445F4F39DC3}" type="slidenum">
               <a:rPr lang="en-US" smtClean="0"/>
-              <a:t>‹#›</a:t>
             </a:fld>
             <a:endParaRPr lang="en-US"/>
           </a:p>
         </p:txBody>
       </p:sp>
     </p:spTree>
-    <p:extLst>
-      <p:ext uri="{BB962C8B-B14F-4D97-AF65-F5344CB8AC3E}">
-        <p14:creationId xmlns:p14="http://schemas.microsoft.com/office/powerpoint/2010/main" val="2928363560"/>
-      </p:ext>
-    </p:extLst>
   </p:cSld>
   <p:clrMapOvr>
     <a:masterClrMapping/>
@@ -878,6 +865,7 @@
               <a:rPr lang="en-US"/>
               <a:t>Click to edit Master title style</a:t>
             </a:r>
+            <a:endParaRPr lang="en-US"/>
           </a:p>
         </p:txBody>
       </p:sp>
@@ -997,6 +985,7 @@
               <a:rPr lang="en-US"/>
               <a:t>Edit Master text styles</a:t>
             </a:r>
+            <a:endParaRPr lang="en-US"/>
           </a:p>
         </p:txBody>
       </p:sp>
@@ -1017,7 +1006,6 @@
           <a:p>
             <a:fld id="{2470446D-3114-4B29-93A0-424C0DADEEAA}" type="datetimeFigureOut">
               <a:rPr lang="en-US" smtClean="0"/>
-              <a:t>7/14/2026</a:t>
             </a:fld>
             <a:endParaRPr lang="en-US"/>
           </a:p>
@@ -1059,18 +1047,12 @@
           <a:p>
             <a:fld id="{9ADE9FB4-766D-41AC-A33E-A445F4F39DC3}" type="slidenum">
               <a:rPr lang="en-US" smtClean="0"/>
-              <a:t>‹#›</a:t>
             </a:fld>
             <a:endParaRPr lang="en-US"/>
           </a:p>
         </p:txBody>
       </p:sp>
     </p:spTree>
-    <p:extLst>
-      <p:ext uri="{BB962C8B-B14F-4D97-AF65-F5344CB8AC3E}">
-        <p14:creationId xmlns:p14="http://schemas.microsoft.com/office/powerpoint/2010/main" val="925657803"/>
-      </p:ext>
-    </p:extLst>
   </p:cSld>
   <p:clrMapOvr>
     <a:masterClrMapping/>
@@ -1114,6 +1096,7 @@
               <a:rPr lang="en-US"/>
               <a:t>Click to edit Master title style</a:t>
             </a:r>
+            <a:endParaRPr lang="en-US"/>
           </a:p>
         </p:txBody>
       </p:sp>
@@ -1142,6 +1125,7 @@
               <a:rPr lang="en-US"/>
               <a:t>Edit Master text styles</a:t>
             </a:r>
+            <a:endParaRPr lang="en-US"/>
           </a:p>
           <a:p>
             <a:pPr lvl="1"/>
@@ -1149,6 +1133,7 @@
               <a:rPr lang="en-US"/>
               <a:t>Second level</a:t>
             </a:r>
+            <a:endParaRPr lang="en-US"/>
           </a:p>
           <a:p>
             <a:pPr lvl="2"/>
@@ -1156,6 +1141,7 @@
               <a:rPr lang="en-US"/>
               <a:t>Third level</a:t>
             </a:r>
+            <a:endParaRPr lang="en-US"/>
           </a:p>
           <a:p>
             <a:pPr lvl="3"/>
@@ -1163,6 +1149,7 @@
               <a:rPr lang="en-US"/>
               <a:t>Fourth level</a:t>
             </a:r>
+            <a:endParaRPr lang="en-US"/>
           </a:p>
           <a:p>
             <a:pPr lvl="4"/>
@@ -1170,6 +1157,7 @@
               <a:rPr lang="en-US"/>
               <a:t>Fifth level</a:t>
             </a:r>
+            <a:endParaRPr lang="en-US"/>
           </a:p>
         </p:txBody>
       </p:sp>
@@ -1198,6 +1186,7 @@
               <a:rPr lang="en-US"/>
               <a:t>Edit Master text styles</a:t>
             </a:r>
+            <a:endParaRPr lang="en-US"/>
           </a:p>
           <a:p>
             <a:pPr lvl="1"/>
@@ -1205,6 +1194,7 @@
               <a:rPr lang="en-US"/>
               <a:t>Second level</a:t>
             </a:r>
+            <a:endParaRPr lang="en-US"/>
           </a:p>
           <a:p>
             <a:pPr lvl="2"/>
@@ -1212,6 +1202,7 @@
               <a:rPr lang="en-US"/>
               <a:t>Third level</a:t>
             </a:r>
+            <a:endParaRPr lang="en-US"/>
           </a:p>
           <a:p>
             <a:pPr lvl="3"/>
@@ -1219,6 +1210,7 @@
               <a:rPr lang="en-US"/>
               <a:t>Fourth level</a:t>
             </a:r>
+            <a:endParaRPr lang="en-US"/>
           </a:p>
           <a:p>
             <a:pPr lvl="4"/>
@@ -1226,6 +1218,7 @@
               <a:rPr lang="en-US"/>
               <a:t>Fifth level</a:t>
             </a:r>
+            <a:endParaRPr lang="en-US"/>
           </a:p>
         </p:txBody>
       </p:sp>
@@ -1246,7 +1239,6 @@
           <a:p>
             <a:fld id="{2470446D-3114-4B29-93A0-424C0DADEEAA}" type="datetimeFigureOut">
               <a:rPr lang="en-US" smtClean="0"/>
-              <a:t>7/14/2026</a:t>
             </a:fld>
             <a:endParaRPr lang="en-US"/>
           </a:p>
@@ -1288,18 +1280,12 @@
           <a:p>
             <a:fld id="{9ADE9FB4-766D-41AC-A33E-A445F4F39DC3}" type="slidenum">
               <a:rPr lang="en-US" smtClean="0"/>
-              <a:t>‹#›</a:t>
             </a:fld>
             <a:endParaRPr lang="en-US"/>
           </a:p>
         </p:txBody>
       </p:sp>
     </p:spTree>
-    <p:extLst>
-      <p:ext uri="{BB962C8B-B14F-4D97-AF65-F5344CB8AC3E}">
-        <p14:creationId xmlns:p14="http://schemas.microsoft.com/office/powerpoint/2010/main" val="1622890261"/>
-      </p:ext>
-    </p:extLst>
   </p:cSld>
   <p:clrMapOvr>
     <a:masterClrMapping/>
@@ -1348,6 +1334,7 @@
               <a:rPr lang="en-US"/>
               <a:t>Click to edit Master title style</a:t>
             </a:r>
+            <a:endParaRPr lang="en-US"/>
           </a:p>
         </p:txBody>
       </p:sp>
@@ -1413,6 +1400,7 @@
               <a:rPr lang="en-US"/>
               <a:t>Edit Master text styles</a:t>
             </a:r>
+            <a:endParaRPr lang="en-US"/>
           </a:p>
         </p:txBody>
       </p:sp>
@@ -1441,6 +1429,7 @@
               <a:rPr lang="en-US"/>
               <a:t>Edit Master text styles</a:t>
             </a:r>
+            <a:endParaRPr lang="en-US"/>
           </a:p>
           <a:p>
             <a:pPr lvl="1"/>
@@ -1448,6 +1437,7 @@
               <a:rPr lang="en-US"/>
               <a:t>Second level</a:t>
             </a:r>
+            <a:endParaRPr lang="en-US"/>
           </a:p>
           <a:p>
             <a:pPr lvl="2"/>
@@ -1455,6 +1445,7 @@
               <a:rPr lang="en-US"/>
               <a:t>Third level</a:t>
             </a:r>
+            <a:endParaRPr lang="en-US"/>
           </a:p>
           <a:p>
             <a:pPr lvl="3"/>
@@ -1462,6 +1453,7 @@
               <a:rPr lang="en-US"/>
               <a:t>Fourth level</a:t>
             </a:r>
+            <a:endParaRPr lang="en-US"/>
           </a:p>
           <a:p>
             <a:pPr lvl="4"/>
@@ -1469,6 +1461,7 @@
               <a:rPr lang="en-US"/>
               <a:t>Fifth level</a:t>
             </a:r>
+            <a:endParaRPr lang="en-US"/>
           </a:p>
         </p:txBody>
       </p:sp>
@@ -1534,6 +1527,7 @@
               <a:rPr lang="en-US"/>
               <a:t>Edit Master text styles</a:t>
             </a:r>
+            <a:endParaRPr lang="en-US"/>
           </a:p>
         </p:txBody>
       </p:sp>
@@ -1562,6 +1556,7 @@
               <a:rPr lang="en-US"/>
               <a:t>Edit Master text styles</a:t>
             </a:r>
+            <a:endParaRPr lang="en-US"/>
           </a:p>
           <a:p>
             <a:pPr lvl="1"/>
@@ -1569,6 +1564,7 @@
               <a:rPr lang="en-US"/>
               <a:t>Second level</a:t>
             </a:r>
+            <a:endParaRPr lang="en-US"/>
           </a:p>
           <a:p>
             <a:pPr lvl="2"/>
@@ -1576,6 +1572,7 @@
               <a:rPr lang="en-US"/>
               <a:t>Third level</a:t>
             </a:r>
+            <a:endParaRPr lang="en-US"/>
           </a:p>
           <a:p>
             <a:pPr lvl="3"/>
@@ -1583,6 +1580,7 @@
               <a:rPr lang="en-US"/>
               <a:t>Fourth level</a:t>
             </a:r>
+            <a:endParaRPr lang="en-US"/>
           </a:p>
           <a:p>
             <a:pPr lvl="4"/>
@@ -1590,6 +1588,7 @@
               <a:rPr lang="en-US"/>
               <a:t>Fifth level</a:t>
             </a:r>
+            <a:endParaRPr lang="en-US"/>
           </a:p>
         </p:txBody>
       </p:sp>
@@ -1610,7 +1609,6 @@
           <a:p>
             <a:fld id="{2470446D-3114-4B29-93A0-424C0DADEEAA}" type="datetimeFigureOut">
               <a:rPr lang="en-US" smtClean="0"/>
-              <a:t>7/14/2026</a:t>
             </a:fld>
             <a:endParaRPr lang="en-US"/>
           </a:p>
@@ -1652,18 +1650,12 @@
           <a:p>
             <a:fld id="{9ADE9FB4-766D-41AC-A33E-A445F4F39DC3}" type="slidenum">
               <a:rPr lang="en-US" smtClean="0"/>
-              <a:t>‹#›</a:t>
             </a:fld>
             <a:endParaRPr lang="en-US"/>
           </a:p>
         </p:txBody>
       </p:sp>
     </p:spTree>
-    <p:extLst>
-      <p:ext uri="{BB962C8B-B14F-4D97-AF65-F5344CB8AC3E}">
-        <p14:creationId xmlns:p14="http://schemas.microsoft.com/office/powerpoint/2010/main" val="344083898"/>
-      </p:ext>
-    </p:extLst>
   </p:cSld>
   <p:clrMapOvr>
     <a:masterClrMapping/>
@@ -1707,6 +1699,7 @@
               <a:rPr lang="en-US"/>
               <a:t>Click to edit Master title style</a:t>
             </a:r>
+            <a:endParaRPr lang="en-US"/>
           </a:p>
         </p:txBody>
       </p:sp>
@@ -1727,7 +1720,6 @@
           <a:p>
             <a:fld id="{2470446D-3114-4B29-93A0-424C0DADEEAA}" type="datetimeFigureOut">
               <a:rPr lang="en-US" smtClean="0"/>
-              <a:t>7/14/2026</a:t>
             </a:fld>
             <a:endParaRPr lang="en-US"/>
           </a:p>
@@ -1769,18 +1761,12 @@
           <a:p>
             <a:fld id="{9ADE9FB4-766D-41AC-A33E-A445F4F39DC3}" type="slidenum">
               <a:rPr lang="en-US" smtClean="0"/>
-              <a:t>‹#›</a:t>
             </a:fld>
             <a:endParaRPr lang="en-US"/>
           </a:p>
         </p:txBody>
       </p:sp>
     </p:spTree>
-    <p:extLst>
-      <p:ext uri="{BB962C8B-B14F-4D97-AF65-F5344CB8AC3E}">
-        <p14:creationId xmlns:p14="http://schemas.microsoft.com/office/powerpoint/2010/main" val="3703880511"/>
-      </p:ext>
-    </p:extLst>
   </p:cSld>
   <p:clrMapOvr>
     <a:masterClrMapping/>
@@ -1822,7 +1808,6 @@
           <a:p>
             <a:fld id="{2470446D-3114-4B29-93A0-424C0DADEEAA}" type="datetimeFigureOut">
               <a:rPr lang="en-US" smtClean="0"/>
-              <a:t>7/14/2026</a:t>
             </a:fld>
             <a:endParaRPr lang="en-US"/>
           </a:p>
@@ -1864,18 +1849,12 @@
           <a:p>
             <a:fld id="{9ADE9FB4-766D-41AC-A33E-A445F4F39DC3}" type="slidenum">
               <a:rPr lang="en-US" smtClean="0"/>
-              <a:t>‹#›</a:t>
             </a:fld>
             <a:endParaRPr lang="en-US"/>
           </a:p>
         </p:txBody>
       </p:sp>
     </p:spTree>
-    <p:extLst>
-      <p:ext uri="{BB962C8B-B14F-4D97-AF65-F5344CB8AC3E}">
-        <p14:creationId xmlns:p14="http://schemas.microsoft.com/office/powerpoint/2010/main" val="2666888578"/>
-      </p:ext>
-    </p:extLst>
   </p:cSld>
   <p:clrMapOvr>
     <a:masterClrMapping/>
@@ -1928,6 +1907,7 @@
               <a:rPr lang="en-US"/>
               <a:t>Click to edit Master title style</a:t>
             </a:r>
+            <a:endParaRPr lang="en-US"/>
           </a:p>
         </p:txBody>
       </p:sp>
@@ -1984,6 +1964,7 @@
               <a:rPr lang="en-US"/>
               <a:t>Edit Master text styles</a:t>
             </a:r>
+            <a:endParaRPr lang="en-US"/>
           </a:p>
           <a:p>
             <a:pPr lvl="1"/>
@@ -1991,6 +1972,7 @@
               <a:rPr lang="en-US"/>
               <a:t>Second level</a:t>
             </a:r>
+            <a:endParaRPr lang="en-US"/>
           </a:p>
           <a:p>
             <a:pPr lvl="2"/>
@@ -1998,6 +1980,7 @@
               <a:rPr lang="en-US"/>
               <a:t>Third level</a:t>
             </a:r>
+            <a:endParaRPr lang="en-US"/>
           </a:p>
           <a:p>
             <a:pPr lvl="3"/>
@@ -2005,6 +1988,7 @@
               <a:rPr lang="en-US"/>
               <a:t>Fourth level</a:t>
             </a:r>
+            <a:endParaRPr lang="en-US"/>
           </a:p>
           <a:p>
             <a:pPr lvl="4"/>
@@ -2012,6 +1996,7 @@
               <a:rPr lang="en-US"/>
               <a:t>Fifth level</a:t>
             </a:r>
+            <a:endParaRPr lang="en-US"/>
           </a:p>
         </p:txBody>
       </p:sp>
@@ -2077,6 +2062,7 @@
               <a:rPr lang="en-US"/>
               <a:t>Edit Master text styles</a:t>
             </a:r>
+            <a:endParaRPr lang="en-US"/>
           </a:p>
         </p:txBody>
       </p:sp>
@@ -2097,7 +2083,6 @@
           <a:p>
             <a:fld id="{2470446D-3114-4B29-93A0-424C0DADEEAA}" type="datetimeFigureOut">
               <a:rPr lang="en-US" smtClean="0"/>
-              <a:t>7/14/2026</a:t>
             </a:fld>
             <a:endParaRPr lang="en-US"/>
           </a:p>
@@ -2139,18 +2124,12 @@
           <a:p>
             <a:fld id="{9ADE9FB4-766D-41AC-A33E-A445F4F39DC3}" type="slidenum">
               <a:rPr lang="en-US" smtClean="0"/>
-              <a:t>‹#›</a:t>
             </a:fld>
             <a:endParaRPr lang="en-US"/>
           </a:p>
         </p:txBody>
       </p:sp>
     </p:spTree>
-    <p:extLst>
-      <p:ext uri="{BB962C8B-B14F-4D97-AF65-F5344CB8AC3E}">
-        <p14:creationId xmlns:p14="http://schemas.microsoft.com/office/powerpoint/2010/main" val="1796927453"/>
-      </p:ext>
-    </p:extLst>
   </p:cSld>
   <p:clrMapOvr>
     <a:masterClrMapping/>
@@ -2203,6 +2182,7 @@
               <a:rPr lang="en-US"/>
               <a:t>Click to edit Master title style</a:t>
             </a:r>
+            <a:endParaRPr lang="en-US"/>
           </a:p>
         </p:txBody>
       </p:sp>
@@ -2329,6 +2309,7 @@
               <a:rPr lang="en-US"/>
               <a:t>Edit Master text styles</a:t>
             </a:r>
+            <a:endParaRPr lang="en-US"/>
           </a:p>
         </p:txBody>
       </p:sp>
@@ -2349,7 +2330,6 @@
           <a:p>
             <a:fld id="{2470446D-3114-4B29-93A0-424C0DADEEAA}" type="datetimeFigureOut">
               <a:rPr lang="en-US" smtClean="0"/>
-              <a:t>7/14/2026</a:t>
             </a:fld>
             <a:endParaRPr lang="en-US"/>
           </a:p>
@@ -2391,18 +2371,12 @@
           <a:p>
             <a:fld id="{9ADE9FB4-766D-41AC-A33E-A445F4F39DC3}" type="slidenum">
               <a:rPr lang="en-US" smtClean="0"/>
-              <a:t>‹#›</a:t>
             </a:fld>
             <a:endParaRPr lang="en-US"/>
           </a:p>
         </p:txBody>
       </p:sp>
     </p:spTree>
-    <p:extLst>
-      <p:ext uri="{BB962C8B-B14F-4D97-AF65-F5344CB8AC3E}">
-        <p14:creationId xmlns:p14="http://schemas.microsoft.com/office/powerpoint/2010/main" val="2826450188"/>
-      </p:ext>
-    </p:extLst>
   </p:cSld>
   <p:clrMapOvr>
     <a:masterClrMapping/>
@@ -2461,6 +2435,7 @@
               <a:rPr lang="en-US"/>
               <a:t>Click to edit Master title style</a:t>
             </a:r>
+            <a:endParaRPr lang="en-US"/>
           </a:p>
         </p:txBody>
       </p:sp>
@@ -2494,6 +2469,7 @@
               <a:rPr lang="en-US"/>
               <a:t>Edit Master text styles</a:t>
             </a:r>
+            <a:endParaRPr lang="en-US"/>
           </a:p>
           <a:p>
             <a:pPr lvl="1"/>
@@ -2501,6 +2477,7 @@
               <a:rPr lang="en-US"/>
               <a:t>Second level</a:t>
             </a:r>
+            <a:endParaRPr lang="en-US"/>
           </a:p>
           <a:p>
             <a:pPr lvl="2"/>
@@ -2508,6 +2485,7 @@
               <a:rPr lang="en-US"/>
               <a:t>Third level</a:t>
             </a:r>
+            <a:endParaRPr lang="en-US"/>
           </a:p>
           <a:p>
             <a:pPr lvl="3"/>
@@ -2515,6 +2493,7 @@
               <a:rPr lang="en-US"/>
               <a:t>Fourth level</a:t>
             </a:r>
+            <a:endParaRPr lang="en-US"/>
           </a:p>
           <a:p>
             <a:pPr lvl="4"/>
@@ -2522,6 +2501,7 @@
               <a:rPr lang="en-US"/>
               <a:t>Fifth level</a:t>
             </a:r>
+            <a:endParaRPr lang="en-US"/>
           </a:p>
         </p:txBody>
       </p:sp>
@@ -2560,7 +2540,6 @@
           <a:p>
             <a:fld id="{2470446D-3114-4B29-93A0-424C0DADEEAA}" type="datetimeFigureOut">
               <a:rPr lang="en-US" smtClean="0"/>
-              <a:t>7/14/2026</a:t>
             </a:fld>
             <a:endParaRPr lang="en-US"/>
           </a:p>
@@ -2638,18 +2617,12 @@
           <a:p>
             <a:fld id="{9ADE9FB4-766D-41AC-A33E-A445F4F39DC3}" type="slidenum">
               <a:rPr lang="en-US" smtClean="0"/>
-              <a:t>‹#›</a:t>
             </a:fld>
             <a:endParaRPr lang="en-US"/>
           </a:p>
         </p:txBody>
       </p:sp>
     </p:spTree>
-    <p:extLst>
-      <p:ext uri="{BB962C8B-B14F-4D97-AF65-F5344CB8AC3E}">
-        <p14:creationId xmlns:p14="http://schemas.microsoft.com/office/powerpoint/2010/main" val="916837150"/>
-      </p:ext>
-    </p:extLst>
   </p:cSld>
   <p:clrMap bg1="lt1" tx1="dk1" bg2="lt2" tx2="dk2" accent1="accent1" accent2="accent2" accent3="accent3" accent4="accent4" accent5="accent5" accent6="accent6" hlink="hlink" folHlink="folHlink"/>
   <p:sldLayoutIdLst>
@@ -3012,7 +2985,7 @@
           <p:nvPr/>
         </p:nvPicPr>
         <p:blipFill>
-          <a:blip r:embed="rId2"/>
+          <a:blip r:embed="rId1"/>
           <a:stretch>
             <a:fillRect/>
           </a:stretch>
@@ -3028,11 +3001,6 @@
         </p:spPr>
       </p:pic>
     </p:spTree>
-    <p:extLst>
-      <p:ext uri="{BB962C8B-B14F-4D97-AF65-F5344CB8AC3E}">
-        <p14:creationId xmlns:p14="http://schemas.microsoft.com/office/powerpoint/2010/main" val="2106119798"/>
-      </p:ext>
-    </p:extLst>
   </p:cSld>
   <p:clrMapOvr>
     <a:masterClrMapping/>
@@ -3085,6 +3053,7 @@
               <a:rPr lang="en-US" dirty="0"/>
               <a:t> </a:t>
             </a:r>
+            <a:endParaRPr lang="en-US" dirty="0"/>
           </a:p>
         </p:txBody>
       </p:sp>
@@ -3099,7 +3068,7 @@
           </p:nvPr>
         </p:nvPicPr>
         <p:blipFill>
-          <a:blip r:embed="rId2"/>
+          <a:blip r:embed="rId1"/>
           <a:stretch>
             <a:fillRect/>
           </a:stretch>
@@ -3123,7 +3092,7 @@
           <p:nvPr/>
         </p:nvPicPr>
         <p:blipFill>
-          <a:blip r:embed="rId3"/>
+          <a:blip r:embed="rId2"/>
           <a:stretch>
             <a:fillRect/>
           </a:stretch>
@@ -3139,11 +3108,6 @@
         </p:spPr>
       </p:pic>
     </p:spTree>
-    <p:extLst>
-      <p:ext uri="{BB962C8B-B14F-4D97-AF65-F5344CB8AC3E}">
-        <p14:creationId xmlns:p14="http://schemas.microsoft.com/office/powerpoint/2010/main" val="2677385005"/>
-      </p:ext>
-    </p:extLst>
   </p:cSld>
   <p:clrMapOvr>
     <a:masterClrMapping/>
@@ -3196,6 +3160,7 @@
               <a:rPr lang="en-US" dirty="0"/>
               <a:t> </a:t>
             </a:r>
+            <a:endParaRPr lang="en-US" dirty="0"/>
           </a:p>
         </p:txBody>
       </p:sp>
@@ -3221,6 +3186,30 @@
       <p:pic>
         <p:nvPicPr>
           <p:cNvPr id="6" name="Picture 5"/>
+          <p:cNvPicPr>
+            <a:picLocks noChangeAspect="1"/>
+          </p:cNvPicPr>
+          <p:nvPr/>
+        </p:nvPicPr>
+        <p:blipFill>
+          <a:blip r:embed="rId1"/>
+          <a:stretch>
+            <a:fillRect/>
+          </a:stretch>
+        </p:blipFill>
+        <p:spPr>
+          <a:xfrm>
+            <a:off x="185324" y="1276764"/>
+            <a:ext cx="7220958" cy="5449060"/>
+          </a:xfrm>
+          <a:prstGeom prst="rect">
+            <a:avLst/>
+          </a:prstGeom>
+        </p:spPr>
+      </p:pic>
+      <p:pic>
+        <p:nvPicPr>
+          <p:cNvPr id="8" name="Picture 7"/>
           <p:cNvPicPr>
             <a:picLocks noChangeAspect="1"/>
           </p:cNvPicPr>
@@ -3234,44 +3223,15 @@
         </p:blipFill>
         <p:spPr>
           <a:xfrm>
-            <a:off x="185324" y="1276764"/>
-            <a:ext cx="7220958" cy="5449060"/>
+            <a:off x="7781309" y="957601"/>
+            <a:ext cx="4410691" cy="5630061"/>
           </a:xfrm>
           <a:prstGeom prst="rect">
             <a:avLst/>
           </a:prstGeom>
         </p:spPr>
       </p:pic>
-      <p:pic>
-        <p:nvPicPr>
-          <p:cNvPr id="8" name="Picture 7"/>
-          <p:cNvPicPr>
-            <a:picLocks noChangeAspect="1"/>
-          </p:cNvPicPr>
-          <p:nvPr/>
-        </p:nvPicPr>
-        <p:blipFill>
-          <a:blip r:embed="rId3"/>
-          <a:stretch>
-            <a:fillRect/>
-          </a:stretch>
-        </p:blipFill>
-        <p:spPr>
-          <a:xfrm>
-            <a:off x="7781309" y="957601"/>
-            <a:ext cx="4410691" cy="5630061"/>
-          </a:xfrm>
-          <a:prstGeom prst="rect">
-            <a:avLst/>
-          </a:prstGeom>
-        </p:spPr>
-      </p:pic>
     </p:spTree>
-    <p:extLst>
-      <p:ext uri="{BB962C8B-B14F-4D97-AF65-F5344CB8AC3E}">
-        <p14:creationId xmlns:p14="http://schemas.microsoft.com/office/powerpoint/2010/main" val="4031351378"/>
-      </p:ext>
-    </p:extLst>
   </p:cSld>
   <p:clrMapOvr>
     <a:masterClrMapping/>
@@ -3324,6 +3284,7 @@
               <a:rPr lang="en-US" dirty="0"/>
               <a:t> </a:t>
             </a:r>
+            <a:endParaRPr lang="en-US" dirty="0"/>
           </a:p>
         </p:txBody>
       </p:sp>
@@ -3349,6 +3310,30 @@
       <p:pic>
         <p:nvPicPr>
           <p:cNvPr id="4" name="Picture 3"/>
+          <p:cNvPicPr>
+            <a:picLocks noChangeAspect="1"/>
+          </p:cNvPicPr>
+          <p:nvPr/>
+        </p:nvPicPr>
+        <p:blipFill>
+          <a:blip r:embed="rId1"/>
+          <a:stretch>
+            <a:fillRect/>
+          </a:stretch>
+        </p:blipFill>
+        <p:spPr>
+          <a:xfrm>
+            <a:off x="460131" y="1227939"/>
+            <a:ext cx="4410691" cy="5630061"/>
+          </a:xfrm>
+          <a:prstGeom prst="rect">
+            <a:avLst/>
+          </a:prstGeom>
+        </p:spPr>
+      </p:pic>
+      <p:pic>
+        <p:nvPicPr>
+          <p:cNvPr id="5" name="Picture 4"/>
           <p:cNvPicPr>
             <a:picLocks noChangeAspect="1"/>
           </p:cNvPicPr>
@@ -3362,30 +3347,6 @@
         </p:blipFill>
         <p:spPr>
           <a:xfrm>
-            <a:off x="460131" y="1227939"/>
-            <a:ext cx="4410691" cy="5630061"/>
-          </a:xfrm>
-          <a:prstGeom prst="rect">
-            <a:avLst/>
-          </a:prstGeom>
-        </p:spPr>
-      </p:pic>
-      <p:pic>
-        <p:nvPicPr>
-          <p:cNvPr id="5" name="Picture 4"/>
-          <p:cNvPicPr>
-            <a:picLocks noChangeAspect="1"/>
-          </p:cNvPicPr>
-          <p:nvPr/>
-        </p:nvPicPr>
-        <p:blipFill>
-          <a:blip r:embed="rId3"/>
-          <a:stretch>
-            <a:fillRect/>
-          </a:stretch>
-        </p:blipFill>
-        <p:spPr>
-          <a:xfrm>
             <a:off x="5158702" y="765912"/>
             <a:ext cx="6573167" cy="3277057"/>
           </a:xfrm>
@@ -3403,7 +3364,7 @@
           <p:nvPr/>
         </p:nvPicPr>
         <p:blipFill>
-          <a:blip r:embed="rId4"/>
+          <a:blip r:embed="rId3"/>
           <a:stretch>
             <a:fillRect/>
           </a:stretch>
@@ -3485,11 +3446,6 @@
         </p:style>
       </p:cxnSp>
     </p:spTree>
-    <p:extLst>
-      <p:ext uri="{BB962C8B-B14F-4D97-AF65-F5344CB8AC3E}">
-        <p14:creationId xmlns:p14="http://schemas.microsoft.com/office/powerpoint/2010/main" val="3178045372"/>
-      </p:ext>
-    </p:extLst>
   </p:cSld>
   <p:clrMapOvr>
     <a:masterClrMapping/>
@@ -3542,6 +3498,7 @@
               <a:rPr lang="en-US" dirty="0"/>
               <a:t> </a:t>
             </a:r>
+            <a:endParaRPr lang="en-US" dirty="0"/>
           </a:p>
         </p:txBody>
       </p:sp>
@@ -3567,6 +3524,30 @@
       <p:pic>
         <p:nvPicPr>
           <p:cNvPr id="5" name="Picture 4"/>
+          <p:cNvPicPr>
+            <a:picLocks noChangeAspect="1"/>
+          </p:cNvPicPr>
+          <p:nvPr/>
+        </p:nvPicPr>
+        <p:blipFill>
+          <a:blip r:embed="rId1"/>
+          <a:stretch>
+            <a:fillRect/>
+          </a:stretch>
+        </p:blipFill>
+        <p:spPr>
+          <a:xfrm>
+            <a:off x="82061" y="1316038"/>
+            <a:ext cx="5070963" cy="5541963"/>
+          </a:xfrm>
+          <a:prstGeom prst="rect">
+            <a:avLst/>
+          </a:prstGeom>
+        </p:spPr>
+      </p:pic>
+      <p:pic>
+        <p:nvPicPr>
+          <p:cNvPr id="6" name="Picture 5"/>
           <p:cNvPicPr>
             <a:picLocks noChangeAspect="1"/>
           </p:cNvPicPr>
@@ -3580,44 +3561,15 @@
         </p:blipFill>
         <p:spPr>
           <a:xfrm>
-            <a:off x="82061" y="1316038"/>
-            <a:ext cx="5070963" cy="5541963"/>
+            <a:off x="5153024" y="567531"/>
+            <a:ext cx="6928934" cy="6153150"/>
           </a:xfrm>
           <a:prstGeom prst="rect">
             <a:avLst/>
           </a:prstGeom>
         </p:spPr>
       </p:pic>
-      <p:pic>
-        <p:nvPicPr>
-          <p:cNvPr id="6" name="Picture 5"/>
-          <p:cNvPicPr>
-            <a:picLocks noChangeAspect="1"/>
-          </p:cNvPicPr>
-          <p:nvPr/>
-        </p:nvPicPr>
-        <p:blipFill>
-          <a:blip r:embed="rId3"/>
-          <a:stretch>
-            <a:fillRect/>
-          </a:stretch>
-        </p:blipFill>
-        <p:spPr>
-          <a:xfrm>
-            <a:off x="5153024" y="567531"/>
-            <a:ext cx="6928934" cy="6153150"/>
-          </a:xfrm>
-          <a:prstGeom prst="rect">
-            <a:avLst/>
-          </a:prstGeom>
-        </p:spPr>
-      </p:pic>
     </p:spTree>
-    <p:extLst>
-      <p:ext uri="{BB962C8B-B14F-4D97-AF65-F5344CB8AC3E}">
-        <p14:creationId xmlns:p14="http://schemas.microsoft.com/office/powerpoint/2010/main" val="1408719597"/>
-      </p:ext>
-    </p:extLst>
   </p:cSld>
   <p:clrMapOvr>
     <a:masterClrMapping/>
@@ -3670,6 +3622,7 @@
               <a:rPr lang="en-US" dirty="0"/>
               <a:t> </a:t>
             </a:r>
+            <a:endParaRPr lang="en-US" dirty="0"/>
           </a:p>
         </p:txBody>
       </p:sp>
@@ -3695,6 +3648,30 @@
       <p:pic>
         <p:nvPicPr>
           <p:cNvPr id="6" name="Picture 5"/>
+          <p:cNvPicPr>
+            <a:picLocks noChangeAspect="1"/>
+          </p:cNvPicPr>
+          <p:nvPr/>
+        </p:nvPicPr>
+        <p:blipFill>
+          <a:blip r:embed="rId1"/>
+          <a:stretch>
+            <a:fillRect/>
+          </a:stretch>
+        </p:blipFill>
+        <p:spPr>
+          <a:xfrm>
+            <a:off x="11723" y="1757742"/>
+            <a:ext cx="6547339" cy="4839375"/>
+          </a:xfrm>
+          <a:prstGeom prst="rect">
+            <a:avLst/>
+          </a:prstGeom>
+        </p:spPr>
+      </p:pic>
+      <p:pic>
+        <p:nvPicPr>
+          <p:cNvPr id="4" name="Picture 3"/>
           <p:cNvPicPr>
             <a:picLocks noChangeAspect="1"/>
           </p:cNvPicPr>
@@ -3708,8 +3685,8 @@
         </p:blipFill>
         <p:spPr>
           <a:xfrm>
-            <a:off x="11723" y="1757742"/>
-            <a:ext cx="6547339" cy="4839375"/>
+            <a:off x="7167282" y="678875"/>
+            <a:ext cx="4348443" cy="3235900"/>
           </a:xfrm>
           <a:prstGeom prst="rect">
             <a:avLst/>
@@ -3718,7 +3695,7 @@
       </p:pic>
       <p:pic>
         <p:nvPicPr>
-          <p:cNvPr id="4" name="Picture 3"/>
+          <p:cNvPr id="7" name="Picture 6"/>
           <p:cNvPicPr>
             <a:picLocks noChangeAspect="1"/>
           </p:cNvPicPr>
@@ -3732,44 +3709,15 @@
         </p:blipFill>
         <p:spPr>
           <a:xfrm>
-            <a:off x="7167282" y="678875"/>
-            <a:ext cx="4348443" cy="3235900"/>
+            <a:off x="6950322" y="4162049"/>
+            <a:ext cx="5229955" cy="2695951"/>
           </a:xfrm>
           <a:prstGeom prst="rect">
             <a:avLst/>
           </a:prstGeom>
         </p:spPr>
       </p:pic>
-      <p:pic>
-        <p:nvPicPr>
-          <p:cNvPr id="7" name="Picture 6"/>
-          <p:cNvPicPr>
-            <a:picLocks noChangeAspect="1"/>
-          </p:cNvPicPr>
-          <p:nvPr/>
-        </p:nvPicPr>
-        <p:blipFill>
-          <a:blip r:embed="rId4"/>
-          <a:stretch>
-            <a:fillRect/>
-          </a:stretch>
-        </p:blipFill>
-        <p:spPr>
-          <a:xfrm>
-            <a:off x="6950322" y="4162049"/>
-            <a:ext cx="5229955" cy="2695951"/>
-          </a:xfrm>
-          <a:prstGeom prst="rect">
-            <a:avLst/>
-          </a:prstGeom>
-        </p:spPr>
-      </p:pic>
     </p:spTree>
-    <p:extLst>
-      <p:ext uri="{BB962C8B-B14F-4D97-AF65-F5344CB8AC3E}">
-        <p14:creationId xmlns:p14="http://schemas.microsoft.com/office/powerpoint/2010/main" val="572774248"/>
-      </p:ext>
-    </p:extLst>
   </p:cSld>
   <p:clrMapOvr>
     <a:masterClrMapping/>
@@ -3822,6 +3770,7 @@
               <a:rPr lang="en-US" dirty="0"/>
               <a:t> </a:t>
             </a:r>
+            <a:endParaRPr lang="en-US" dirty="0"/>
           </a:p>
         </p:txBody>
       </p:sp>
@@ -3847,6 +3796,30 @@
       <p:pic>
         <p:nvPicPr>
           <p:cNvPr id="5" name="Picture 4"/>
+          <p:cNvPicPr>
+            <a:picLocks noChangeAspect="1"/>
+          </p:cNvPicPr>
+          <p:nvPr/>
+        </p:nvPicPr>
+        <p:blipFill>
+          <a:blip r:embed="rId1"/>
+          <a:stretch>
+            <a:fillRect/>
+          </a:stretch>
+        </p:blipFill>
+        <p:spPr>
+          <a:xfrm>
+            <a:off x="0" y="870400"/>
+            <a:ext cx="6753225" cy="5892349"/>
+          </a:xfrm>
+          <a:prstGeom prst="rect">
+            <a:avLst/>
+          </a:prstGeom>
+        </p:spPr>
+      </p:pic>
+      <p:pic>
+        <p:nvPicPr>
+          <p:cNvPr id="7" name="Picture 6"/>
           <p:cNvPicPr>
             <a:picLocks noChangeAspect="1"/>
           </p:cNvPicPr>
@@ -3860,44 +3833,15 @@
         </p:blipFill>
         <p:spPr>
           <a:xfrm>
-            <a:off x="0" y="870400"/>
-            <a:ext cx="6753225" cy="5892349"/>
+            <a:off x="6954685" y="638175"/>
+            <a:ext cx="5237315" cy="6124574"/>
           </a:xfrm>
           <a:prstGeom prst="rect">
             <a:avLst/>
           </a:prstGeom>
         </p:spPr>
       </p:pic>
-      <p:pic>
-        <p:nvPicPr>
-          <p:cNvPr id="7" name="Picture 6"/>
-          <p:cNvPicPr>
-            <a:picLocks noChangeAspect="1"/>
-          </p:cNvPicPr>
-          <p:nvPr/>
-        </p:nvPicPr>
-        <p:blipFill>
-          <a:blip r:embed="rId3"/>
-          <a:stretch>
-            <a:fillRect/>
-          </a:stretch>
-        </p:blipFill>
-        <p:spPr>
-          <a:xfrm>
-            <a:off x="6954685" y="638175"/>
-            <a:ext cx="5237315" cy="6124574"/>
-          </a:xfrm>
-          <a:prstGeom prst="rect">
-            <a:avLst/>
-          </a:prstGeom>
-        </p:spPr>
-      </p:pic>
     </p:spTree>
-    <p:extLst>
-      <p:ext uri="{BB962C8B-B14F-4D97-AF65-F5344CB8AC3E}">
-        <p14:creationId xmlns:p14="http://schemas.microsoft.com/office/powerpoint/2010/main" val="1833559687"/>
-      </p:ext>
-    </p:extLst>
   </p:cSld>
   <p:clrMapOvr>
     <a:masterClrMapping/>
@@ -3950,6 +3894,7 @@
               <a:rPr lang="en-US" dirty="0"/>
               <a:t> </a:t>
             </a:r>
+            <a:endParaRPr lang="en-US" dirty="0"/>
           </a:p>
         </p:txBody>
       </p:sp>
@@ -3975,6 +3920,30 @@
       <p:pic>
         <p:nvPicPr>
           <p:cNvPr id="6" name="Picture 5"/>
+          <p:cNvPicPr>
+            <a:picLocks noChangeAspect="1"/>
+          </p:cNvPicPr>
+          <p:nvPr/>
+        </p:nvPicPr>
+        <p:blipFill>
+          <a:blip r:embed="rId1"/>
+          <a:stretch>
+            <a:fillRect/>
+          </a:stretch>
+        </p:blipFill>
+        <p:spPr>
+          <a:xfrm>
+            <a:off x="0" y="1085716"/>
+            <a:ext cx="5418290" cy="3086367"/>
+          </a:xfrm>
+          <a:prstGeom prst="rect">
+            <a:avLst/>
+          </a:prstGeom>
+        </p:spPr>
+      </p:pic>
+      <p:pic>
+        <p:nvPicPr>
+          <p:cNvPr id="4" name="Picture 3"/>
           <p:cNvPicPr>
             <a:picLocks noChangeAspect="1"/>
           </p:cNvPicPr>
@@ -3988,44 +3957,15 @@
         </p:blipFill>
         <p:spPr>
           <a:xfrm>
-            <a:off x="0" y="1085716"/>
-            <a:ext cx="5418290" cy="3086367"/>
+            <a:off x="5962430" y="1143659"/>
+            <a:ext cx="5934803" cy="5247615"/>
           </a:xfrm>
           <a:prstGeom prst="rect">
             <a:avLst/>
           </a:prstGeom>
         </p:spPr>
       </p:pic>
-      <p:pic>
-        <p:nvPicPr>
-          <p:cNvPr id="4" name="Picture 3"/>
-          <p:cNvPicPr>
-            <a:picLocks noChangeAspect="1"/>
-          </p:cNvPicPr>
-          <p:nvPr/>
-        </p:nvPicPr>
-        <p:blipFill>
-          <a:blip r:embed="rId3"/>
-          <a:stretch>
-            <a:fillRect/>
-          </a:stretch>
-        </p:blipFill>
-        <p:spPr>
-          <a:xfrm>
-            <a:off x="5962430" y="1143659"/>
-            <a:ext cx="5934803" cy="5247615"/>
-          </a:xfrm>
-          <a:prstGeom prst="rect">
-            <a:avLst/>
-          </a:prstGeom>
-        </p:spPr>
-      </p:pic>
     </p:spTree>
-    <p:extLst>
-      <p:ext uri="{BB962C8B-B14F-4D97-AF65-F5344CB8AC3E}">
-        <p14:creationId xmlns:p14="http://schemas.microsoft.com/office/powerpoint/2010/main" val="1712812835"/>
-      </p:ext>
-    </p:extLst>
   </p:cSld>
   <p:clrMapOvr>
     <a:masterClrMapping/>
@@ -4078,6 +4018,7 @@
               <a:rPr lang="en-US" dirty="0"/>
               <a:t> </a:t>
             </a:r>
+            <a:endParaRPr lang="en-US" dirty="0"/>
           </a:p>
         </p:txBody>
       </p:sp>
@@ -4103,6 +4044,30 @@
       <p:pic>
         <p:nvPicPr>
           <p:cNvPr id="4" name="Picture 3"/>
+          <p:cNvPicPr>
+            <a:picLocks noChangeAspect="1"/>
+          </p:cNvPicPr>
+          <p:nvPr/>
+        </p:nvPicPr>
+        <p:blipFill>
+          <a:blip r:embed="rId1"/>
+          <a:stretch>
+            <a:fillRect/>
+          </a:stretch>
+        </p:blipFill>
+        <p:spPr>
+          <a:xfrm>
+            <a:off x="161197" y="1030288"/>
+            <a:ext cx="5934803" cy="5247615"/>
+          </a:xfrm>
+          <a:prstGeom prst="rect">
+            <a:avLst/>
+          </a:prstGeom>
+        </p:spPr>
+      </p:pic>
+      <p:pic>
+        <p:nvPicPr>
+          <p:cNvPr id="5" name="Picture 4"/>
           <p:cNvPicPr>
             <a:picLocks noChangeAspect="1"/>
           </p:cNvPicPr>
@@ -4116,44 +4081,15 @@
         </p:blipFill>
         <p:spPr>
           <a:xfrm>
-            <a:off x="161197" y="1030288"/>
-            <a:ext cx="5934803" cy="5247615"/>
+            <a:off x="6289867" y="1030287"/>
+            <a:ext cx="5952782" cy="5146676"/>
           </a:xfrm>
           <a:prstGeom prst="rect">
             <a:avLst/>
           </a:prstGeom>
         </p:spPr>
       </p:pic>
-      <p:pic>
-        <p:nvPicPr>
-          <p:cNvPr id="5" name="Picture 4"/>
-          <p:cNvPicPr>
-            <a:picLocks noChangeAspect="1"/>
-          </p:cNvPicPr>
-          <p:nvPr/>
-        </p:nvPicPr>
-        <p:blipFill>
-          <a:blip r:embed="rId3"/>
-          <a:stretch>
-            <a:fillRect/>
-          </a:stretch>
-        </p:blipFill>
-        <p:spPr>
-          <a:xfrm>
-            <a:off x="6289867" y="1030287"/>
-            <a:ext cx="5952782" cy="5146676"/>
-          </a:xfrm>
-          <a:prstGeom prst="rect">
-            <a:avLst/>
-          </a:prstGeom>
-        </p:spPr>
-      </p:pic>
     </p:spTree>
-    <p:extLst>
-      <p:ext uri="{BB962C8B-B14F-4D97-AF65-F5344CB8AC3E}">
-        <p14:creationId xmlns:p14="http://schemas.microsoft.com/office/powerpoint/2010/main" val="1202943964"/>
-      </p:ext>
-    </p:extLst>
   </p:cSld>
   <p:clrMapOvr>
     <a:masterClrMapping/>
@@ -4233,7 +4169,7 @@
           <p:nvPr/>
         </p:nvPicPr>
         <p:blipFill>
-          <a:blip r:embed="rId2"/>
+          <a:blip r:embed="rId1"/>
           <a:stretch>
             <a:fillRect/>
           </a:stretch>
@@ -4257,7 +4193,7 @@
           <p:nvPr/>
         </p:nvPicPr>
         <p:blipFill>
-          <a:blip r:embed="rId3"/>
+          <a:blip r:embed="rId2"/>
           <a:stretch>
             <a:fillRect/>
           </a:stretch>
@@ -4273,11 +4209,6 @@
         </p:spPr>
       </p:pic>
     </p:spTree>
-    <p:extLst>
-      <p:ext uri="{BB962C8B-B14F-4D97-AF65-F5344CB8AC3E}">
-        <p14:creationId xmlns:p14="http://schemas.microsoft.com/office/powerpoint/2010/main" val="3150642053"/>
-      </p:ext>
-    </p:extLst>
   </p:cSld>
   <p:clrMapOvr>
     <a:masterClrMapping/>
@@ -4349,6 +4280,30 @@
           <p:nvPr/>
         </p:nvPicPr>
         <p:blipFill>
+          <a:blip r:embed="rId1"/>
+          <a:stretch>
+            <a:fillRect/>
+          </a:stretch>
+        </p:blipFill>
+        <p:spPr>
+          <a:xfrm>
+            <a:off x="0" y="0"/>
+            <a:ext cx="7021830" cy="3490595"/>
+          </a:xfrm>
+          <a:prstGeom prst="rect">
+            <a:avLst/>
+          </a:prstGeom>
+        </p:spPr>
+      </p:pic>
+      <p:pic>
+        <p:nvPicPr>
+          <p:cNvPr id="5" name="Picture 4"/>
+          <p:cNvPicPr>
+            <a:picLocks noChangeAspect="1"/>
+          </p:cNvPicPr>
+          <p:nvPr/>
+        </p:nvPicPr>
+        <p:blipFill>
           <a:blip r:embed="rId2"/>
           <a:stretch>
             <a:fillRect/>
@@ -4356,8 +4311,8 @@
         </p:blipFill>
         <p:spPr>
           <a:xfrm>
-            <a:off x="-72618" y="0"/>
-            <a:ext cx="7094354" cy="3490546"/>
+            <a:off x="6096000" y="2055813"/>
+            <a:ext cx="5190265" cy="4375094"/>
           </a:xfrm>
           <a:prstGeom prst="rect">
             <a:avLst/>
@@ -4366,7 +4321,7 @@
       </p:pic>
       <p:pic>
         <p:nvPicPr>
-          <p:cNvPr id="5" name="Picture 4"/>
+          <p:cNvPr id="6" name="Picture 5"/>
           <p:cNvPicPr>
             <a:picLocks noChangeAspect="1"/>
           </p:cNvPicPr>
@@ -4380,44 +4335,15 @@
         </p:blipFill>
         <p:spPr>
           <a:xfrm>
-            <a:off x="6096000" y="2055813"/>
-            <a:ext cx="5190265" cy="4375094"/>
+            <a:off x="9085683" y="4757701"/>
+            <a:ext cx="2200582" cy="523948"/>
           </a:xfrm>
           <a:prstGeom prst="rect">
             <a:avLst/>
           </a:prstGeom>
         </p:spPr>
       </p:pic>
-      <p:pic>
-        <p:nvPicPr>
-          <p:cNvPr id="6" name="Picture 5"/>
-          <p:cNvPicPr>
-            <a:picLocks noChangeAspect="1"/>
-          </p:cNvPicPr>
-          <p:nvPr/>
-        </p:nvPicPr>
-        <p:blipFill>
-          <a:blip r:embed="rId4"/>
-          <a:stretch>
-            <a:fillRect/>
-          </a:stretch>
-        </p:blipFill>
-        <p:spPr>
-          <a:xfrm>
-            <a:off x="9085683" y="4757701"/>
-            <a:ext cx="2200582" cy="523948"/>
-          </a:xfrm>
-          <a:prstGeom prst="rect">
-            <a:avLst/>
-          </a:prstGeom>
-        </p:spPr>
-      </p:pic>
     </p:spTree>
-    <p:extLst>
-      <p:ext uri="{BB962C8B-B14F-4D97-AF65-F5344CB8AC3E}">
-        <p14:creationId xmlns:p14="http://schemas.microsoft.com/office/powerpoint/2010/main" val="2634131341"/>
-      </p:ext>
-    </p:extLst>
   </p:cSld>
   <p:clrMapOvr>
     <a:masterClrMapping/>
@@ -4489,7 +4415,7 @@
           <p:nvPr/>
         </p:nvPicPr>
         <p:blipFill>
-          <a:blip r:embed="rId2"/>
+          <a:blip r:embed="rId1"/>
           <a:stretch>
             <a:fillRect/>
           </a:stretch>
@@ -4513,7 +4439,7 @@
           <p:nvPr/>
         </p:nvPicPr>
         <p:blipFill>
-          <a:blip r:embed="rId3"/>
+          <a:blip r:embed="rId2"/>
           <a:stretch>
             <a:fillRect/>
           </a:stretch>
@@ -4529,11 +4455,6 @@
         </p:spPr>
       </p:pic>
     </p:spTree>
-    <p:extLst>
-      <p:ext uri="{BB962C8B-B14F-4D97-AF65-F5344CB8AC3E}">
-        <p14:creationId xmlns:p14="http://schemas.microsoft.com/office/powerpoint/2010/main" val="3952837350"/>
-      </p:ext>
-    </p:extLst>
   </p:cSld>
   <p:clrMapOvr>
     <a:masterClrMapping/>
@@ -4577,6 +4498,7 @@
               <a:rPr lang="en-US" dirty="0"/>
               <a:t>Optimization algorithms</a:t>
             </a:r>
+            <a:endParaRPr lang="en-US" dirty="0"/>
           </a:p>
         </p:txBody>
       </p:sp>
@@ -4600,11 +4522,6 @@
         </p:txBody>
       </p:sp>
     </p:spTree>
-    <p:extLst>
-      <p:ext uri="{BB962C8B-B14F-4D97-AF65-F5344CB8AC3E}">
-        <p14:creationId xmlns:p14="http://schemas.microsoft.com/office/powerpoint/2010/main" val="3256070693"/>
-      </p:ext>
-    </p:extLst>
   </p:cSld>
   <p:clrMapOvr>
     <a:masterClrMapping/>
@@ -4676,7 +4593,7 @@
           <p:nvPr/>
         </p:nvPicPr>
         <p:blipFill>
-          <a:blip r:embed="rId2"/>
+          <a:blip r:embed="rId1"/>
           <a:stretch>
             <a:fillRect/>
           </a:stretch>
@@ -4721,11 +4638,6 @@
         </p:txBody>
       </p:sp>
     </p:spTree>
-    <p:extLst>
-      <p:ext uri="{BB962C8B-B14F-4D97-AF65-F5344CB8AC3E}">
-        <p14:creationId xmlns:p14="http://schemas.microsoft.com/office/powerpoint/2010/main" val="2342512151"/>
-      </p:ext>
-    </p:extLst>
   </p:cSld>
   <p:clrMapOvr>
     <a:masterClrMapping/>
@@ -4797,7 +4709,7 @@
           <p:nvPr/>
         </p:nvPicPr>
         <p:blipFill>
-          <a:blip r:embed="rId2"/>
+          <a:blip r:embed="rId1"/>
           <a:stretch>
             <a:fillRect/>
           </a:stretch>
@@ -4821,7 +4733,7 @@
           <p:nvPr/>
         </p:nvPicPr>
         <p:blipFill>
-          <a:blip r:embed="rId3"/>
+          <a:blip r:embed="rId2"/>
           <a:stretch>
             <a:fillRect/>
           </a:stretch>
@@ -4837,11 +4749,6 @@
         </p:spPr>
       </p:pic>
     </p:spTree>
-    <p:extLst>
-      <p:ext uri="{BB962C8B-B14F-4D97-AF65-F5344CB8AC3E}">
-        <p14:creationId xmlns:p14="http://schemas.microsoft.com/office/powerpoint/2010/main" val="1530140391"/>
-      </p:ext>
-    </p:extLst>
   </p:cSld>
   <p:clrMapOvr>
     <a:masterClrMapping/>
@@ -4913,7 +4820,7 @@
           <p:nvPr/>
         </p:nvPicPr>
         <p:blipFill>
-          <a:blip r:embed="rId2"/>
+          <a:blip r:embed="rId1"/>
           <a:stretch>
             <a:fillRect/>
           </a:stretch>
@@ -4937,7 +4844,7 @@
           <p:nvPr/>
         </p:nvPicPr>
         <p:blipFill>
-          <a:blip r:embed="rId3"/>
+          <a:blip r:embed="rId2"/>
           <a:stretch>
             <a:fillRect/>
           </a:stretch>
@@ -4953,11 +4860,6 @@
         </p:spPr>
       </p:pic>
     </p:spTree>
-    <p:extLst>
-      <p:ext uri="{BB962C8B-B14F-4D97-AF65-F5344CB8AC3E}">
-        <p14:creationId xmlns:p14="http://schemas.microsoft.com/office/powerpoint/2010/main" val="1365973440"/>
-      </p:ext>
-    </p:extLst>
   </p:cSld>
   <p:clrMapOvr>
     <a:masterClrMapping/>
@@ -5010,6 +4912,7 @@
               <a:rPr lang="en-US" dirty="0"/>
               <a:t> </a:t>
             </a:r>
+            <a:endParaRPr lang="en-US" dirty="0"/>
           </a:p>
         </p:txBody>
       </p:sp>
@@ -5035,6 +4938,30 @@
       <p:pic>
         <p:nvPicPr>
           <p:cNvPr id="4" name="Picture 3"/>
+          <p:cNvPicPr>
+            <a:picLocks noChangeAspect="1"/>
+          </p:cNvPicPr>
+          <p:nvPr/>
+        </p:nvPicPr>
+        <p:blipFill>
+          <a:blip r:embed="rId1"/>
+          <a:stretch>
+            <a:fillRect/>
+          </a:stretch>
+        </p:blipFill>
+        <p:spPr>
+          <a:xfrm>
+            <a:off x="0" y="1413798"/>
+            <a:ext cx="5525271" cy="4763165"/>
+          </a:xfrm>
+          <a:prstGeom prst="rect">
+            <a:avLst/>
+          </a:prstGeom>
+        </p:spPr>
+      </p:pic>
+      <p:pic>
+        <p:nvPicPr>
+          <p:cNvPr id="5" name="Picture 4"/>
           <p:cNvPicPr>
             <a:picLocks noChangeAspect="1"/>
           </p:cNvPicPr>
@@ -5048,44 +4975,15 @@
         </p:blipFill>
         <p:spPr>
           <a:xfrm>
-            <a:off x="0" y="1413798"/>
-            <a:ext cx="5525271" cy="4763165"/>
+            <a:off x="7195486" y="3372368"/>
+            <a:ext cx="4096322" cy="3067478"/>
           </a:xfrm>
           <a:prstGeom prst="rect">
             <a:avLst/>
           </a:prstGeom>
         </p:spPr>
       </p:pic>
-      <p:pic>
-        <p:nvPicPr>
-          <p:cNvPr id="5" name="Picture 4"/>
-          <p:cNvPicPr>
-            <a:picLocks noChangeAspect="1"/>
-          </p:cNvPicPr>
-          <p:nvPr/>
-        </p:nvPicPr>
-        <p:blipFill>
-          <a:blip r:embed="rId3"/>
-          <a:stretch>
-            <a:fillRect/>
-          </a:stretch>
-        </p:blipFill>
-        <p:spPr>
-          <a:xfrm>
-            <a:off x="7195486" y="3372368"/>
-            <a:ext cx="4096322" cy="3067478"/>
-          </a:xfrm>
-          <a:prstGeom prst="rect">
-            <a:avLst/>
-          </a:prstGeom>
-        </p:spPr>
-      </p:pic>
     </p:spTree>
-    <p:extLst>
-      <p:ext uri="{BB962C8B-B14F-4D97-AF65-F5344CB8AC3E}">
-        <p14:creationId xmlns:p14="http://schemas.microsoft.com/office/powerpoint/2010/main" val="3024822708"/>
-      </p:ext>
-    </p:extLst>
   </p:cSld>
   <p:clrMapOvr>
     <a:masterClrMapping/>
@@ -5138,6 +5036,7 @@
               <a:rPr lang="en-US" dirty="0"/>
               <a:t> </a:t>
             </a:r>
+            <a:endParaRPr lang="en-US" dirty="0"/>
           </a:p>
         </p:txBody>
       </p:sp>
@@ -5150,7 +5049,7 @@
           <p:nvPr/>
         </p:nvPicPr>
         <p:blipFill>
-          <a:blip r:embed="rId2"/>
+          <a:blip r:embed="rId1"/>
           <a:stretch>
             <a:fillRect/>
           </a:stretch>
@@ -5210,7 +5109,7 @@
           <p:nvPr/>
         </p:nvPicPr>
         <p:blipFill>
-          <a:blip r:embed="rId3"/>
+          <a:blip r:embed="rId2"/>
           <a:stretch>
             <a:fillRect/>
           </a:stretch>
@@ -5234,7 +5133,7 @@
           <p:nvPr/>
         </p:nvPicPr>
         <p:blipFill>
-          <a:blip r:embed="rId4"/>
+          <a:blip r:embed="rId3"/>
           <a:stretch>
             <a:fillRect/>
           </a:stretch>
@@ -5294,7 +5193,7 @@
           <p:nvPr/>
         </p:nvPicPr>
         <p:blipFill>
-          <a:blip r:embed="rId5"/>
+          <a:blip r:embed="rId4"/>
           <a:stretch>
             <a:fillRect/>
           </a:stretch>
@@ -5318,7 +5217,7 @@
           <p:nvPr/>
         </p:nvPicPr>
         <p:blipFill>
-          <a:blip r:embed="rId6"/>
+          <a:blip r:embed="rId5"/>
           <a:stretch>
             <a:fillRect/>
           </a:stretch>
@@ -5370,11 +5269,6 @@
         </p:style>
       </p:cxnSp>
     </p:spTree>
-    <p:extLst>
-      <p:ext uri="{BB962C8B-B14F-4D97-AF65-F5344CB8AC3E}">
-        <p14:creationId xmlns:p14="http://schemas.microsoft.com/office/powerpoint/2010/main" val="1507797016"/>
-      </p:ext>
-    </p:extLst>
   </p:cSld>
   <p:clrMapOvr>
     <a:masterClrMapping/>
@@ -5425,7 +5319,7 @@
     </a:clrScheme>
     <a:fontScheme name="Office">
       <a:majorFont>
-        <a:latin typeface="Calibri Light" panose="020F0302020204030204"/>
+        <a:latin typeface="Calibri Light"/>
         <a:ea typeface=""/>
         <a:cs typeface=""/>
         <a:font script="Jpan" typeface="游ゴシック Light"/>
@@ -5460,7 +5354,7 @@
         <a:font script="Geor" typeface="Sylfaen"/>
       </a:majorFont>
       <a:minorFont>
-        <a:latin typeface="Calibri" panose="020F0502020204030204"/>
+        <a:latin typeface="Calibri"/>
         <a:ea typeface=""/>
         <a:cs typeface=""/>
         <a:font script="Jpan" typeface="游ゴシック"/>
@@ -5633,8 +5527,6 @@
       </a:bgFillStyleLst>
     </a:fmtScheme>
   </a:themeElements>
-  <a:objectDefaults/>
-  <a:extraClrSchemeLst/>
   <a:extLst>
     <a:ext uri="{05A4C25C-085E-4340-85A3-A5531E510DB2}">
       <thm15:themeFamily xmlns:thm15="http://schemas.microsoft.com/office/thememl/2012/main" name="Office Theme" id="{62F939B6-93AF-4DB8-9C6B-D6C7DFDC589F}" vid="{4A3C46E8-61CC-4603-A589-7422A47A8E4A}"/>
